--- a/catalog/editorial/templates/ed_timeline_vertical_3.pptx
+++ b/catalog/editorial/templates/ed_timeline_vertical_3.pptx
@@ -3577,7 +3577,7 @@
           <a:noFill/>
         </p:spPr>
         <p:txBody>
-          <a:bodyPr wrap="square" lIns="18288" rIns="18288" tIns="13716" bIns="13716">
+          <a:bodyPr wrap="square" anchor="t" lIns="18288" rIns="18288" tIns="13716" bIns="13716">
             <a:noAutofit/>
           </a:bodyPr>
           <a:lstStyle/>
@@ -3632,7 +3632,7 @@
           <a:noFill/>
         </p:spPr>
         <p:txBody>
-          <a:bodyPr wrap="square" lIns="18288" rIns="18288" tIns="13716" bIns="13716">
+          <a:bodyPr wrap="square" anchor="t" lIns="18288" rIns="18288" tIns="13716" bIns="13716">
             <a:noAutofit/>
           </a:bodyPr>
           <a:lstStyle/>
@@ -3687,7 +3687,7 @@
           <a:noFill/>
         </p:spPr>
         <p:txBody>
-          <a:bodyPr wrap="square" lIns="18288" rIns="18288" tIns="13716" bIns="13716">
+          <a:bodyPr wrap="square" anchor="t" lIns="18288" rIns="18288" tIns="13716" bIns="13716">
             <a:noAutofit/>
           </a:bodyPr>
           <a:lstStyle/>
@@ -3786,7 +3786,7 @@
           <a:noFill/>
         </p:spPr>
         <p:txBody>
-          <a:bodyPr wrap="square" lIns="18288" rIns="18288" tIns="13716" bIns="13716">
+          <a:bodyPr wrap="square" anchor="t" lIns="18288" rIns="18288" tIns="13716" bIns="13716">
             <a:noAutofit/>
           </a:bodyPr>
           <a:lstStyle/>
@@ -3841,7 +3841,7 @@
           <a:noFill/>
         </p:spPr>
         <p:txBody>
-          <a:bodyPr wrap="square" lIns="18288" rIns="18288" tIns="13716" bIns="13716">
+          <a:bodyPr wrap="square" anchor="t" lIns="18288" rIns="18288" tIns="13716" bIns="13716">
             <a:noAutofit/>
           </a:bodyPr>
           <a:lstStyle/>
@@ -3975,8 +3975,8 @@
         </p:nvSpPr>
         <p:spPr>
           <a:xfrm>
-            <a:off x="2212848" y="2157984"/>
-            <a:ext cx="2834640" cy="685800"/>
+            <a:off x="2212848" y="2167127"/>
+            <a:ext cx="2834640" cy="1240536"/>
           </a:xfrm>
           <a:prstGeom prst="rect">
             <a:avLst/>
@@ -3984,7 +3984,7 @@
           <a:noFill/>
         </p:spPr>
         <p:txBody>
-          <a:bodyPr wrap="square" lIns="18288" rIns="18288" tIns="13716" bIns="13716">
+          <a:bodyPr wrap="square" anchor="ctr" lIns="18288" rIns="18288" tIns="13716" bIns="13716">
             <a:noAutofit/>
           </a:bodyPr>
           <a:lstStyle/>
@@ -4030,8 +4030,8 @@
         </p:nvSpPr>
         <p:spPr>
           <a:xfrm>
-            <a:off x="5257800" y="2157984"/>
-            <a:ext cx="6263640" cy="1267968"/>
+            <a:off x="5257800" y="2167127"/>
+            <a:ext cx="6263640" cy="1240536"/>
           </a:xfrm>
           <a:prstGeom prst="rect">
             <a:avLst/>
@@ -4039,7 +4039,7 @@
           <a:noFill/>
         </p:spPr>
         <p:txBody>
-          <a:bodyPr wrap="square" lIns="18288" rIns="18288" tIns="13716" bIns="13716">
+          <a:bodyPr wrap="square" anchor="ctr" lIns="18288" rIns="18288" tIns="13716" bIns="13716">
             <a:noAutofit/>
           </a:bodyPr>
           <a:lstStyle/>
@@ -4085,8 +4085,8 @@
         </p:nvSpPr>
         <p:spPr>
           <a:xfrm>
-            <a:off x="621792" y="2139696"/>
-            <a:ext cx="1170432" cy="594360"/>
+            <a:off x="621792" y="2167127"/>
+            <a:ext cx="1170432" cy="1240536"/>
           </a:xfrm>
           <a:prstGeom prst="rect">
             <a:avLst/>
@@ -4094,7 +4094,7 @@
           <a:noFill/>
         </p:spPr>
         <p:txBody>
-          <a:bodyPr wrap="square" lIns="18288" rIns="18288" tIns="13716" bIns="13716">
+          <a:bodyPr wrap="square" anchor="ctr" lIns="18288" rIns="18288" tIns="13716" bIns="13716">
             <a:noAutofit/>
           </a:bodyPr>
           <a:lstStyle/>
@@ -4184,8 +4184,8 @@
         </p:nvSpPr>
         <p:spPr>
           <a:xfrm>
-            <a:off x="2212848" y="3453384"/>
-            <a:ext cx="2834640" cy="685800"/>
+            <a:off x="2212848" y="3462528"/>
+            <a:ext cx="2834640" cy="1240536"/>
           </a:xfrm>
           <a:prstGeom prst="rect">
             <a:avLst/>
@@ -4193,7 +4193,7 @@
           <a:noFill/>
         </p:spPr>
         <p:txBody>
-          <a:bodyPr wrap="square" lIns="18288" rIns="18288" tIns="13716" bIns="13716">
+          <a:bodyPr wrap="square" anchor="ctr" lIns="18288" rIns="18288" tIns="13716" bIns="13716">
             <a:noAutofit/>
           </a:bodyPr>
           <a:lstStyle/>
@@ -4239,8 +4239,8 @@
         </p:nvSpPr>
         <p:spPr>
           <a:xfrm>
-            <a:off x="5257800" y="3453384"/>
-            <a:ext cx="6263640" cy="1267968"/>
+            <a:off x="5257800" y="3462528"/>
+            <a:ext cx="6263640" cy="1240536"/>
           </a:xfrm>
           <a:prstGeom prst="rect">
             <a:avLst/>
@@ -4248,7 +4248,7 @@
           <a:noFill/>
         </p:spPr>
         <p:txBody>
-          <a:bodyPr wrap="square" lIns="18288" rIns="18288" tIns="13716" bIns="13716">
+          <a:bodyPr wrap="square" anchor="ctr" lIns="18288" rIns="18288" tIns="13716" bIns="13716">
             <a:noAutofit/>
           </a:bodyPr>
           <a:lstStyle/>
@@ -4294,8 +4294,8 @@
         </p:nvSpPr>
         <p:spPr>
           <a:xfrm>
-            <a:off x="621792" y="3435096"/>
-            <a:ext cx="1170432" cy="594360"/>
+            <a:off x="621792" y="3462528"/>
+            <a:ext cx="1170432" cy="1240536"/>
           </a:xfrm>
           <a:prstGeom prst="rect">
             <a:avLst/>
@@ -4303,7 +4303,7 @@
           <a:noFill/>
         </p:spPr>
         <p:txBody>
-          <a:bodyPr wrap="square" lIns="18288" rIns="18288" tIns="13716" bIns="13716">
+          <a:bodyPr wrap="square" anchor="ctr" lIns="18288" rIns="18288" tIns="13716" bIns="13716">
             <a:noAutofit/>
           </a:bodyPr>
           <a:lstStyle/>
@@ -4393,8 +4393,8 @@
         </p:nvSpPr>
         <p:spPr>
           <a:xfrm>
-            <a:off x="2212848" y="4748784"/>
-            <a:ext cx="2834640" cy="685800"/>
+            <a:off x="2212848" y="4757928"/>
+            <a:ext cx="2834640" cy="1240536"/>
           </a:xfrm>
           <a:prstGeom prst="rect">
             <a:avLst/>
@@ -4402,7 +4402,7 @@
           <a:noFill/>
         </p:spPr>
         <p:txBody>
-          <a:bodyPr wrap="square" lIns="18288" rIns="18288" tIns="13716" bIns="13716">
+          <a:bodyPr wrap="square" anchor="ctr" lIns="18288" rIns="18288" tIns="13716" bIns="13716">
             <a:noAutofit/>
           </a:bodyPr>
           <a:lstStyle/>
@@ -4448,8 +4448,8 @@
         </p:nvSpPr>
         <p:spPr>
           <a:xfrm>
-            <a:off x="5257800" y="4748784"/>
-            <a:ext cx="6263640" cy="1267968"/>
+            <a:off x="5257800" y="4757928"/>
+            <a:ext cx="6263640" cy="1240536"/>
           </a:xfrm>
           <a:prstGeom prst="rect">
             <a:avLst/>
@@ -4457,7 +4457,7 @@
           <a:noFill/>
         </p:spPr>
         <p:txBody>
-          <a:bodyPr wrap="square" lIns="18288" rIns="18288" tIns="13716" bIns="13716">
+          <a:bodyPr wrap="square" anchor="ctr" lIns="18288" rIns="18288" tIns="13716" bIns="13716">
             <a:noAutofit/>
           </a:bodyPr>
           <a:lstStyle/>
@@ -4503,8 +4503,8 @@
         </p:nvSpPr>
         <p:spPr>
           <a:xfrm>
-            <a:off x="621792" y="4730496"/>
-            <a:ext cx="1170432" cy="594360"/>
+            <a:off x="621792" y="4757928"/>
+            <a:ext cx="1170432" cy="1240536"/>
           </a:xfrm>
           <a:prstGeom prst="rect">
             <a:avLst/>
@@ -4512,7 +4512,7 @@
           <a:noFill/>
         </p:spPr>
         <p:txBody>
-          <a:bodyPr wrap="square" lIns="18288" rIns="18288" tIns="13716" bIns="13716">
+          <a:bodyPr wrap="square" anchor="ctr" lIns="18288" rIns="18288" tIns="13716" bIns="13716">
             <a:noAutofit/>
           </a:bodyPr>
           <a:lstStyle/>
